--- a/dist/gstack-tutorial-3_EN.pptx
+++ b/dist/gstack-tutorial-3_EN.pptx
@@ -21836,7 +21836,7 @@
                 <a:ea typeface="Microsoft YaHei"/>
                 <a:cs typeface="Microsoft YaHei"/>
               </a:rPr>
-              <a:t>Each stage can report success while producing the wrong artifact</a:t>
+              <a:t>Each stage can report success while producing the wrong output</a:t>
             </a:r>
           </a:p>
         </p:txBody>
